--- a/classes/parte-13-seguridad-movil-iot-e-inalambrica/269-radio-definida-por-software-sdr/clase-269-presentacion.pptx
+++ b/classes/parte-13-seguridad-movil-iot-e-inalambrica/269-radio-definida-por-software-sdr/clase-269-presentacion.pptx
@@ -17,6 +17,10 @@
     <p:sldId id="265" r:id="rId16"/>
     <p:sldId id="266" r:id="rId17"/>
     <p:sldId id="267" r:id="rId18"/>
+    <p:sldId id="268" r:id="rId19"/>
+    <p:sldId id="269" r:id="rId20"/>
+    <p:sldId id="270" r:id="rId21"/>
+    <p:sldId id="271" r:id="rId22"/>
   </p:sldIdLst>
   <p:sldSz cx="9144000" cy="6858000" type="screen4x3"/>
   <p:notesSz cx="6858000" cy="9144000"/>
@@ -3198,7 +3202,7 @@
                   <a:srgbClr val="0B3D2E"/>
                 </a:solidFill>
               </a:rPr>
-              <a:t>⚠️ Errores comunes</a:t>
+              <a:t>🧪 Laboratorio guiado</a:t>
             </a:r>
           </a:p>
         </p:txBody>
@@ -3236,67 +3240,97 @@
                   <a:srgbClr val="22282E"/>
                 </a:solidFill>
               </a:rPr>
-              <a:t>•  rtltest reporta pérdidas — USB saturado o ganancia mal; baja el sample rate</a:t>
-            </a:r>
-          </a:p>
-          <a:p>
-            <a:pPr>
-              <a:spcAft>
-                <a:spcPts val="600"/>
-              </a:spcAft>
-            </a:pPr>
-            <a:r>
-              <a:rPr sz="1500">
-                <a:solidFill>
-                  <a:srgbClr val="22282E"/>
-                </a:solidFill>
-              </a:rPr>
-              <a:t>•  No veo la señal en el waterfall — Frecuencia/ganancia incorrectas; ajusta y amplía el span</a:t>
-            </a:r>
-          </a:p>
-          <a:p>
-            <a:pPr>
-              <a:spcAft>
-                <a:spcPts val="600"/>
-              </a:spcAft>
-            </a:pPr>
-            <a:r>
-              <a:rPr sz="1500">
-                <a:solidFill>
-                  <a:srgbClr val="22282E"/>
-                </a:solidFill>
-              </a:rPr>
-              <a:t>•  Demodulación da bits aleatorios — Samples/símbolo o umbral mal; recalíbralos en URH</a:t>
-            </a:r>
-          </a:p>
-          <a:p>
-            <a:pPr>
-              <a:spcAft>
-                <a:spcPts val="600"/>
-              </a:spcAft>
-            </a:pPr>
-            <a:r>
-              <a:rPr sz="1500">
-                <a:solidFill>
-                  <a:srgbClr val="22282E"/>
-                </a:solidFill>
-              </a:rPr>
-              <a:t>•  Señal muy débil — Antena inadecuada; usa una sintonizada a la banda</a:t>
-            </a:r>
-          </a:p>
-          <a:p>
-            <a:pPr>
-              <a:spcAft>
-                <a:spcPts val="600"/>
-              </a:spcAft>
-            </a:pPr>
-            <a:r>
-              <a:rPr sz="1500">
-                <a:solidFill>
-                  <a:srgbClr val="22282E"/>
-                </a:solidFill>
-              </a:rPr>
-              <a:t>•  Frecuencia ligeramente desviada — Error de PPM del SDR; calíbralo con rtltest -p</a:t>
+              <a:t>•  Conecta el SDR y verifica con rtltest que funciona sin pérdidas de muestras.</a:t>
+            </a:r>
+          </a:p>
+          <a:p>
+            <a:pPr>
+              <a:spcAft>
+                <a:spcPts val="600"/>
+              </a:spcAft>
+            </a:pPr>
+            <a:r>
+              <a:rPr sz="1500">
+                <a:solidFill>
+                  <a:srgbClr val="22282E"/>
+                </a:solidFill>
+              </a:rPr>
+              <a:t>•  Explora el espectro: en GQRX, sintoniza la banda ISM de 433 MHz y observa el waterfall mientras accionas un mando propio.</a:t>
+            </a:r>
+          </a:p>
+          <a:p>
+            <a:pPr>
+              <a:spcAft>
+                <a:spcPts val="600"/>
+              </a:spcAft>
+            </a:pPr>
+            <a:r>
+              <a:rPr sz="1500">
+                <a:solidFill>
+                  <a:srgbClr val="22282E"/>
+                </a:solidFill>
+              </a:rPr>
+              <a:t>•  Localiza la señal: identifica la frecuencia central exacta de la ráfaga del mando.</a:t>
+            </a:r>
+          </a:p>
+          <a:p>
+            <a:pPr>
+              <a:spcAft>
+                <a:spcPts val="600"/>
+              </a:spcAft>
+            </a:pPr>
+            <a:r>
+              <a:rPr sz="1500">
+                <a:solidFill>
+                  <a:srgbClr val="22282E"/>
+                </a:solidFill>
+              </a:rPr>
+              <a:t>•  Captura IQ: graba la transmisión con rtlsdr o desde URH a la frecuencia adecuada.</a:t>
+            </a:r>
+          </a:p>
+          <a:p>
+            <a:pPr>
+              <a:spcAft>
+                <a:spcPts val="600"/>
+              </a:spcAft>
+            </a:pPr>
+            <a:r>
+              <a:rPr sz="1500">
+                <a:solidFill>
+                  <a:srgbClr val="22282E"/>
+                </a:solidFill>
+              </a:rPr>
+              <a:t>•  Determina la modulación: en URH, visualiza la señal y decide si es OOK/ASK o FSK.</a:t>
+            </a:r>
+          </a:p>
+          <a:p>
+            <a:pPr>
+              <a:spcAft>
+                <a:spcPts val="600"/>
+              </a:spcAft>
+            </a:pPr>
+            <a:r>
+              <a:rPr sz="1500">
+                <a:solidFill>
+                  <a:srgbClr val="22282E"/>
+                </a:solidFill>
+              </a:rPr>
+              <a:t>•  Demodula y decodifica: ajusta parámetros (samples/símbolo, umbral) hasta obtener los bits; identifica preámbulo y payload.</a:t>
+            </a:r>
+          </a:p>
+          <a:p>
+            <a:pPr>
+              <a:spcAft>
+                <a:spcPts val="600"/>
+              </a:spcAft>
+            </a:pPr>
+            <a:r>
+              <a:rPr sz="1500">
+                <a:solidFill>
+                  <a:srgbClr val="22282E"/>
+                </a:solidFill>
+              </a:rPr>
+              <a:t>•  Interpreta el protocolo: compara varias pulsaciones para ver qué campos cambian (contador rolling code vs. código fijo).</a:t>
             </a:r>
           </a:p>
         </p:txBody>
@@ -3347,7 +3381,7 @@
                   <a:srgbClr val="0B3D2E"/>
                 </a:solidFill>
               </a:rPr>
-              <a:t>❓ Preguntas frecuentes</a:t>
+              <a:t>✍️ Ejercicios</a:t>
             </a:r>
           </a:p>
         </p:txBody>
@@ -3385,82 +3419,82 @@
                   <a:srgbClr val="22282E"/>
                 </a:solidFill>
               </a:rPr>
-              <a:t>•  ❓ ¿Puedo capturar cualquier frecuencia con un RTL-SDR?</a:t>
-            </a:r>
-          </a:p>
-          <a:p>
-            <a:pPr>
-              <a:spcAft>
-                <a:spcPts val="600"/>
-              </a:spcAft>
-            </a:pPr>
-            <a:r>
-              <a:rPr sz="1500">
-                <a:solidFill>
-                  <a:srgbClr val="22282E"/>
-                </a:solidFill>
-              </a:rPr>
-              <a:t>•  No: cubre aproximadamente 24 MHz–1.7 GHz y solo recibe. Para bandas más altas o transmitir necesitas hardware como HackRF, siempre dentro de la ley.</a:t>
-            </a:r>
-          </a:p>
-          <a:p>
-            <a:pPr>
-              <a:spcAft>
-                <a:spcPts val="600"/>
-              </a:spcAft>
-            </a:pPr>
-            <a:r>
-              <a:rPr sz="1500">
-                <a:solidFill>
-                  <a:srgbClr val="22282E"/>
-                </a:solidFill>
-              </a:rPr>
-              <a:t>•  ❓ ¿Es legal escuchar señales de radio?</a:t>
-            </a:r>
-          </a:p>
-          <a:p>
-            <a:pPr>
-              <a:spcAft>
-                <a:spcPts val="600"/>
-              </a:spcAft>
-            </a:pPr>
-            <a:r>
-              <a:rPr sz="1500">
-                <a:solidFill>
-                  <a:srgbClr val="22282E"/>
-                </a:solidFill>
-              </a:rPr>
-              <a:t>•  Depende del país y de la banda. Escuchar tus propios dispositivos en bandas ISM suele ser aceptable; interceptar comunicaciones ajenas o transmitir sin licencia no lo es.</a:t>
-            </a:r>
-          </a:p>
-          <a:p>
-            <a:pPr>
-              <a:spcAft>
-                <a:spcPts val="600"/>
-              </a:spcAft>
-            </a:pPr>
-            <a:r>
-              <a:rPr sz="1500">
-                <a:solidFill>
-                  <a:srgbClr val="22282E"/>
-                </a:solidFill>
-              </a:rPr>
-              <a:t>•  ❓ ¿Qué es un rolling code y por qué importa?</a:t>
-            </a:r>
-          </a:p>
-          <a:p>
-            <a:pPr>
-              <a:spcAft>
-                <a:spcPts val="600"/>
-              </a:spcAft>
-            </a:pPr>
-            <a:r>
-              <a:rPr sz="1500">
-                <a:solidFill>
-                  <a:srgbClr val="22282E"/>
-                </a:solidFill>
-              </a:rPr>
-              <a:t>•  Un código que cambia en cada uso para evitar ataques de repetición; distinguirlo de un código fijo es clave al analizar mandos y sistemas de acceso.</a:t>
+              <a:t>•  Identifica la frecuencia central de un mando propio con GQRX.</a:t>
+            </a:r>
+          </a:p>
+          <a:p>
+            <a:pPr>
+              <a:spcAft>
+                <a:spcPts val="600"/>
+              </a:spcAft>
+            </a:pPr>
+            <a:r>
+              <a:rPr sz="1500">
+                <a:solidFill>
+                  <a:srgbClr val="22282E"/>
+                </a:solidFill>
+              </a:rPr>
+              <a:t>•  Captura tres pulsaciones del mismo botón a fichero IQ.</a:t>
+            </a:r>
+          </a:p>
+          <a:p>
+            <a:pPr>
+              <a:spcAft>
+                <a:spcPts val="600"/>
+              </a:spcAft>
+            </a:pPr>
+            <a:r>
+              <a:rPr sz="1500">
+                <a:solidFill>
+                  <a:srgbClr val="22282E"/>
+                </a:solidFill>
+              </a:rPr>
+              <a:t>•  Clasifica la modulación observando la forma de onda en URH.</a:t>
+            </a:r>
+          </a:p>
+          <a:p>
+            <a:pPr>
+              <a:spcAft>
+                <a:spcPts val="600"/>
+              </a:spcAft>
+            </a:pPr>
+            <a:r>
+              <a:rPr sz="1500">
+                <a:solidFill>
+                  <a:srgbClr val="22282E"/>
+                </a:solidFill>
+              </a:rPr>
+              <a:t>•  Decodifica los bits de la trama y localiza el preámbulo.</a:t>
+            </a:r>
+          </a:p>
+          <a:p>
+            <a:pPr>
+              <a:spcAft>
+                <a:spcPts val="600"/>
+              </a:spcAft>
+            </a:pPr>
+            <a:r>
+              <a:rPr sz="1500">
+                <a:solidFill>
+                  <a:srgbClr val="22282E"/>
+                </a:solidFill>
+              </a:rPr>
+              <a:t>•  Compara pulsaciones para determinar si usa código fijo o rolling code.</a:t>
+            </a:r>
+          </a:p>
+          <a:p>
+            <a:pPr>
+              <a:spcAft>
+                <a:spcPts val="600"/>
+              </a:spcAft>
+            </a:pPr>
+            <a:r>
+              <a:rPr sz="1500">
+                <a:solidFill>
+                  <a:srgbClr val="22282E"/>
+                </a:solidFill>
+              </a:rPr>
+              <a:t>•  Documenta los parámetros necesarios para reproducir la captura.</a:t>
             </a:r>
           </a:p>
         </p:txBody>
@@ -3511,7 +3545,7 @@
                   <a:srgbClr val="0B3D2E"/>
                 </a:solidFill>
               </a:rPr>
-              <a:t>🔗 Referencias</a:t>
+              <a:t>📝 Reto verificable</a:t>
             </a:r>
           </a:p>
         </p:txBody>
@@ -3549,6 +3583,408 @@
                   <a:srgbClr val="22282E"/>
                 </a:solidFill>
               </a:rPr>
+              <a:t>•  Captura y decodifica la señal de un dispositivo sub-GHz propio (mando de garaje viejo, estación meteorológica, sensor). Criterio de aceptación: entregas la frecuencia, la modulación y la tasa de…</a:t>
+            </a:r>
+          </a:p>
+        </p:txBody>
+      </p:sp>
+    </p:spTree>
+  </p:cSld>
+  <p:clrMapOvr>
+    <a:masterClrMapping/>
+  </p:clrMapOvr>
+</p:sld>
+</file>
+
+<file path=ppt/slides/slide13.xml><?xml version="1.0" encoding="utf-8"?>
+<p:sld xmlns:a="http://schemas.openxmlformats.org/drawingml/2006/main" xmlns:p="http://schemas.openxmlformats.org/presentationml/2006/main" xmlns:r="http://schemas.openxmlformats.org/officeDocument/2006/relationships">
+  <p:cSld>
+    <p:spTree>
+      <p:nvGrpSpPr>
+        <p:cNvPr id="1" name=""/>
+        <p:cNvGrpSpPr/>
+        <p:nvPr/>
+      </p:nvGrpSpPr>
+      <p:grpSpPr/>
+      <p:sp>
+        <p:nvSpPr>
+          <p:cNvPr id="2" name="TextBox 1"/>
+          <p:cNvSpPr txBox="1"/>
+          <p:nvPr/>
+        </p:nvSpPr>
+        <p:spPr>
+          <a:xfrm>
+            <a:off x="457200" y="320040"/>
+            <a:ext cx="8229600" cy="822960"/>
+          </a:xfrm>
+          <a:prstGeom prst="rect">
+            <a:avLst/>
+          </a:prstGeom>
+          <a:noFill/>
+        </p:spPr>
+        <p:txBody>
+          <a:bodyPr wrap="square">
+            <a:spAutoFit/>
+          </a:bodyPr>
+          <a:lstStyle/>
+          <a:p>
+            <a:r>
+              <a:rPr sz="2600" b="1">
+                <a:solidFill>
+                  <a:srgbClr val="0B3D2E"/>
+                </a:solidFill>
+              </a:rPr>
+              <a:t>⚠️ Errores comunes</a:t>
+            </a:r>
+          </a:p>
+        </p:txBody>
+      </p:sp>
+      <p:sp>
+        <p:nvSpPr>
+          <p:cNvPr id="3" name="TextBox 2"/>
+          <p:cNvSpPr txBox="1"/>
+          <p:nvPr/>
+        </p:nvSpPr>
+        <p:spPr>
+          <a:xfrm>
+            <a:off x="457200" y="1280160"/>
+            <a:ext cx="8229600" cy="4937760"/>
+          </a:xfrm>
+          <a:prstGeom prst="rect">
+            <a:avLst/>
+          </a:prstGeom>
+          <a:noFill/>
+        </p:spPr>
+        <p:txBody>
+          <a:bodyPr wrap="square">
+            <a:spAutoFit/>
+          </a:bodyPr>
+          <a:lstStyle/>
+          <a:p>
+            <a:pPr>
+              <a:spcAft>
+                <a:spcPts val="600"/>
+              </a:spcAft>
+            </a:pPr>
+            <a:r>
+              <a:rPr sz="1500">
+                <a:solidFill>
+                  <a:srgbClr val="22282E"/>
+                </a:solidFill>
+              </a:rPr>
+              <a:t>•  rtltest reporta pérdidas — USB saturado o ganancia mal; baja el sample rate</a:t>
+            </a:r>
+          </a:p>
+          <a:p>
+            <a:pPr>
+              <a:spcAft>
+                <a:spcPts val="600"/>
+              </a:spcAft>
+            </a:pPr>
+            <a:r>
+              <a:rPr sz="1500">
+                <a:solidFill>
+                  <a:srgbClr val="22282E"/>
+                </a:solidFill>
+              </a:rPr>
+              <a:t>•  No veo la señal en el waterfall — Frecuencia/ganancia incorrectas; ajusta y amplía el span</a:t>
+            </a:r>
+          </a:p>
+          <a:p>
+            <a:pPr>
+              <a:spcAft>
+                <a:spcPts val="600"/>
+              </a:spcAft>
+            </a:pPr>
+            <a:r>
+              <a:rPr sz="1500">
+                <a:solidFill>
+                  <a:srgbClr val="22282E"/>
+                </a:solidFill>
+              </a:rPr>
+              <a:t>•  Demodulación da bits aleatorios — Samples/símbolo o umbral mal; recalíbralos en URH</a:t>
+            </a:r>
+          </a:p>
+          <a:p>
+            <a:pPr>
+              <a:spcAft>
+                <a:spcPts val="600"/>
+              </a:spcAft>
+            </a:pPr>
+            <a:r>
+              <a:rPr sz="1500">
+                <a:solidFill>
+                  <a:srgbClr val="22282E"/>
+                </a:solidFill>
+              </a:rPr>
+              <a:t>•  Señal muy débil — Antena inadecuada; usa una sintonizada a la banda</a:t>
+            </a:r>
+          </a:p>
+          <a:p>
+            <a:pPr>
+              <a:spcAft>
+                <a:spcPts val="600"/>
+              </a:spcAft>
+            </a:pPr>
+            <a:r>
+              <a:rPr sz="1500">
+                <a:solidFill>
+                  <a:srgbClr val="22282E"/>
+                </a:solidFill>
+              </a:rPr>
+              <a:t>•  Frecuencia ligeramente desviada — Error de PPM del SDR; calíbralo con rtltest -p</a:t>
+            </a:r>
+          </a:p>
+        </p:txBody>
+      </p:sp>
+    </p:spTree>
+  </p:cSld>
+  <p:clrMapOvr>
+    <a:masterClrMapping/>
+  </p:clrMapOvr>
+</p:sld>
+</file>
+
+<file path=ppt/slides/slide14.xml><?xml version="1.0" encoding="utf-8"?>
+<p:sld xmlns:a="http://schemas.openxmlformats.org/drawingml/2006/main" xmlns:p="http://schemas.openxmlformats.org/presentationml/2006/main" xmlns:r="http://schemas.openxmlformats.org/officeDocument/2006/relationships">
+  <p:cSld>
+    <p:spTree>
+      <p:nvGrpSpPr>
+        <p:cNvPr id="1" name=""/>
+        <p:cNvGrpSpPr/>
+        <p:nvPr/>
+      </p:nvGrpSpPr>
+      <p:grpSpPr/>
+      <p:sp>
+        <p:nvSpPr>
+          <p:cNvPr id="2" name="TextBox 1"/>
+          <p:cNvSpPr txBox="1"/>
+          <p:nvPr/>
+        </p:nvSpPr>
+        <p:spPr>
+          <a:xfrm>
+            <a:off x="457200" y="320040"/>
+            <a:ext cx="8229600" cy="822960"/>
+          </a:xfrm>
+          <a:prstGeom prst="rect">
+            <a:avLst/>
+          </a:prstGeom>
+          <a:noFill/>
+        </p:spPr>
+        <p:txBody>
+          <a:bodyPr wrap="square">
+            <a:spAutoFit/>
+          </a:bodyPr>
+          <a:lstStyle/>
+          <a:p>
+            <a:r>
+              <a:rPr sz="2600" b="1">
+                <a:solidFill>
+                  <a:srgbClr val="0B3D2E"/>
+                </a:solidFill>
+              </a:rPr>
+              <a:t>❓ Preguntas frecuentes</a:t>
+            </a:r>
+          </a:p>
+        </p:txBody>
+      </p:sp>
+      <p:sp>
+        <p:nvSpPr>
+          <p:cNvPr id="3" name="TextBox 2"/>
+          <p:cNvSpPr txBox="1"/>
+          <p:nvPr/>
+        </p:nvSpPr>
+        <p:spPr>
+          <a:xfrm>
+            <a:off x="457200" y="1280160"/>
+            <a:ext cx="8229600" cy="4937760"/>
+          </a:xfrm>
+          <a:prstGeom prst="rect">
+            <a:avLst/>
+          </a:prstGeom>
+          <a:noFill/>
+        </p:spPr>
+        <p:txBody>
+          <a:bodyPr wrap="square">
+            <a:spAutoFit/>
+          </a:bodyPr>
+          <a:lstStyle/>
+          <a:p>
+            <a:pPr>
+              <a:spcAft>
+                <a:spcPts val="600"/>
+              </a:spcAft>
+            </a:pPr>
+            <a:r>
+              <a:rPr sz="1500">
+                <a:solidFill>
+                  <a:srgbClr val="22282E"/>
+                </a:solidFill>
+              </a:rPr>
+              <a:t>•  ❓ ¿Puedo capturar cualquier frecuencia con un RTL-SDR?</a:t>
+            </a:r>
+          </a:p>
+          <a:p>
+            <a:pPr>
+              <a:spcAft>
+                <a:spcPts val="600"/>
+              </a:spcAft>
+            </a:pPr>
+            <a:r>
+              <a:rPr sz="1500">
+                <a:solidFill>
+                  <a:srgbClr val="22282E"/>
+                </a:solidFill>
+              </a:rPr>
+              <a:t>•  No: cubre aproximadamente 24 MHz–1.7 GHz y solo recibe. Para bandas más altas o transmitir necesitas hardware como HackRF, siempre dentro de la ley.</a:t>
+            </a:r>
+          </a:p>
+          <a:p>
+            <a:pPr>
+              <a:spcAft>
+                <a:spcPts val="600"/>
+              </a:spcAft>
+            </a:pPr>
+            <a:r>
+              <a:rPr sz="1500">
+                <a:solidFill>
+                  <a:srgbClr val="22282E"/>
+                </a:solidFill>
+              </a:rPr>
+              <a:t>•  ❓ ¿Es legal escuchar señales de radio?</a:t>
+            </a:r>
+          </a:p>
+          <a:p>
+            <a:pPr>
+              <a:spcAft>
+                <a:spcPts val="600"/>
+              </a:spcAft>
+            </a:pPr>
+            <a:r>
+              <a:rPr sz="1500">
+                <a:solidFill>
+                  <a:srgbClr val="22282E"/>
+                </a:solidFill>
+              </a:rPr>
+              <a:t>•  Depende del país y de la banda. Escuchar tus propios dispositivos en bandas ISM suele ser aceptable; interceptar comunicaciones ajenas o transmitir sin licencia no lo es.</a:t>
+            </a:r>
+          </a:p>
+          <a:p>
+            <a:pPr>
+              <a:spcAft>
+                <a:spcPts val="600"/>
+              </a:spcAft>
+            </a:pPr>
+            <a:r>
+              <a:rPr sz="1500">
+                <a:solidFill>
+                  <a:srgbClr val="22282E"/>
+                </a:solidFill>
+              </a:rPr>
+              <a:t>•  ❓ ¿Qué es un rolling code y por qué importa?</a:t>
+            </a:r>
+          </a:p>
+          <a:p>
+            <a:pPr>
+              <a:spcAft>
+                <a:spcPts val="600"/>
+              </a:spcAft>
+            </a:pPr>
+            <a:r>
+              <a:rPr sz="1500">
+                <a:solidFill>
+                  <a:srgbClr val="22282E"/>
+                </a:solidFill>
+              </a:rPr>
+              <a:t>•  Un código que cambia en cada uso para evitar ataques de repetición; distinguirlo de un código fijo es clave al analizar mandos y sistemas de acceso.</a:t>
+            </a:r>
+          </a:p>
+        </p:txBody>
+      </p:sp>
+    </p:spTree>
+  </p:cSld>
+  <p:clrMapOvr>
+    <a:masterClrMapping/>
+  </p:clrMapOvr>
+</p:sld>
+</file>
+
+<file path=ppt/slides/slide15.xml><?xml version="1.0" encoding="utf-8"?>
+<p:sld xmlns:a="http://schemas.openxmlformats.org/drawingml/2006/main" xmlns:p="http://schemas.openxmlformats.org/presentationml/2006/main" xmlns:r="http://schemas.openxmlformats.org/officeDocument/2006/relationships">
+  <p:cSld>
+    <p:spTree>
+      <p:nvGrpSpPr>
+        <p:cNvPr id="1" name=""/>
+        <p:cNvGrpSpPr/>
+        <p:nvPr/>
+      </p:nvGrpSpPr>
+      <p:grpSpPr/>
+      <p:sp>
+        <p:nvSpPr>
+          <p:cNvPr id="2" name="TextBox 1"/>
+          <p:cNvSpPr txBox="1"/>
+          <p:nvPr/>
+        </p:nvSpPr>
+        <p:spPr>
+          <a:xfrm>
+            <a:off x="457200" y="320040"/>
+            <a:ext cx="8229600" cy="822960"/>
+          </a:xfrm>
+          <a:prstGeom prst="rect">
+            <a:avLst/>
+          </a:prstGeom>
+          <a:noFill/>
+        </p:spPr>
+        <p:txBody>
+          <a:bodyPr wrap="square">
+            <a:spAutoFit/>
+          </a:bodyPr>
+          <a:lstStyle/>
+          <a:p>
+            <a:r>
+              <a:rPr sz="2600" b="1">
+                <a:solidFill>
+                  <a:srgbClr val="0B3D2E"/>
+                </a:solidFill>
+              </a:rPr>
+              <a:t>🔗 Referencias</a:t>
+            </a:r>
+          </a:p>
+        </p:txBody>
+      </p:sp>
+      <p:sp>
+        <p:nvSpPr>
+          <p:cNvPr id="3" name="TextBox 2"/>
+          <p:cNvSpPr txBox="1"/>
+          <p:nvPr/>
+        </p:nvSpPr>
+        <p:spPr>
+          <a:xfrm>
+            <a:off x="457200" y="1280160"/>
+            <a:ext cx="8229600" cy="4937760"/>
+          </a:xfrm>
+          <a:prstGeom prst="rect">
+            <a:avLst/>
+          </a:prstGeom>
+          <a:noFill/>
+        </p:spPr>
+        <p:txBody>
+          <a:bodyPr wrap="square">
+            <a:spAutoFit/>
+          </a:bodyPr>
+          <a:lstStyle/>
+          <a:p>
+            <a:pPr>
+              <a:spcAft>
+                <a:spcPts val="600"/>
+              </a:spcAft>
+            </a:pPr>
+            <a:r>
+              <a:rPr sz="1500">
+                <a:solidFill>
+                  <a:srgbClr val="22282E"/>
+                </a:solidFill>
+              </a:rPr>
               <a:t>•  GNU Radio: &lt;https://www.gnuradio.org/&gt;</a:t>
             </a:r>
           </a:p>
@@ -3599,6 +4035,81 @@
           </a:p>
         </p:txBody>
       </p:sp>
+    </p:spTree>
+  </p:cSld>
+  <p:clrMapOvr>
+    <a:masterClrMapping/>
+  </p:clrMapOvr>
+</p:sld>
+</file>
+
+<file path=ppt/slides/slide16.xml><?xml version="1.0" encoding="utf-8"?>
+<p:sld xmlns:a="http://schemas.openxmlformats.org/drawingml/2006/main" xmlns:p="http://schemas.openxmlformats.org/presentationml/2006/main" xmlns:r="http://schemas.openxmlformats.org/officeDocument/2006/relationships">
+  <p:cSld>
+    <p:spTree>
+      <p:nvGrpSpPr>
+        <p:cNvPr id="1" name=""/>
+        <p:cNvGrpSpPr/>
+        <p:nvPr/>
+      </p:nvGrpSpPr>
+      <p:grpSpPr/>
+      <p:sp>
+        <p:nvSpPr>
+          <p:cNvPr id="2" name="TextBox 1"/>
+          <p:cNvSpPr txBox="1"/>
+          <p:nvPr/>
+        </p:nvSpPr>
+        <p:spPr>
+          <a:xfrm>
+            <a:off x="457200" y="274320"/>
+            <a:ext cx="8229600" cy="640080"/>
+          </a:xfrm>
+          <a:prstGeom prst="rect">
+            <a:avLst/>
+          </a:prstGeom>
+          <a:noFill/>
+        </p:spPr>
+        <p:txBody>
+          <a:bodyPr wrap="square">
+            <a:spAutoFit/>
+          </a:bodyPr>
+          <a:lstStyle/>
+          <a:p>
+            <a:r>
+              <a:rPr sz="2200" b="1">
+                <a:solidFill>
+                  <a:srgbClr val="0B3D2E"/>
+                </a:solidFill>
+              </a:rPr>
+              <a:t>Diagrama de la clase</a:t>
+            </a:r>
+          </a:p>
+        </p:txBody>
+      </p:sp>
+      <p:pic>
+        <p:nvPicPr>
+          <p:cNvPr id="3" name="Picture 2" descr="b0c774a4dc204452.png"/>
+          <p:cNvPicPr>
+            <a:picLocks noChangeAspect="1"/>
+          </p:cNvPicPr>
+          <p:nvPr/>
+        </p:nvPicPr>
+        <p:blipFill>
+          <a:blip r:embed="rId2"/>
+          <a:stretch>
+            <a:fillRect/>
+          </a:stretch>
+        </p:blipFill>
+        <p:spPr>
+          <a:xfrm>
+            <a:off x="457200" y="3506724"/>
+            <a:ext cx="8229600" cy="484632"/>
+          </a:xfrm>
+          <a:prstGeom prst="rect">
+            <a:avLst/>
+          </a:prstGeom>
+        </p:spPr>
+      </p:pic>
     </p:spTree>
   </p:cSld>
   <p:clrMapOvr>
@@ -3683,7 +4194,7 @@
                   <a:srgbClr val="22282E"/>
                 </a:solidFill>
               </a:rPr>
-              <a:t>•  Introducir la radio definida por software (SDR) como herramienta para descubrir, capturar y analizar señales inalámbricas más allá de WiFi y Bluetooth: mandos remotos sub-GHz, sensores ISM, telemetría y protocolos propietarios. El alumno aprenderá conceptos de RF (IQ, frecuencia, ancho de banda, modulación), capturará señales con un RTL-SDR/HackRF y las demodulará para entender su contenido, respetando siempre la legalidad del espectro.</a:t>
+              <a:t>•  Introducir la radio definida por software (SDR) como herramienta para descubrir, capturar y analizar señales inalámbricas más allá de WiFi y Bluetooth: mandos remotos sub-GHz, sensores ISM…</a:t>
             </a:r>
           </a:p>
         </p:txBody>
@@ -4092,7 +4603,7 @@
                   <a:srgbClr val="0B3D2E"/>
                 </a:solidFill>
               </a:rPr>
-              <a:t>📖 Definiciones y características</a:t>
+              <a:t>🧠 Explicación en profundidad</a:t>
             </a:r>
           </a:p>
         </p:txBody>
@@ -4130,82 +4641,52 @@
                   <a:srgbClr val="22282E"/>
                 </a:solidFill>
               </a:rPr>
-              <a:t>•  SDR: radio cuyo procesamiento se hace en software sobre muestras digitalizadas. Característica: flexible para muchas bandas y protocolos.</a:t>
-            </a:r>
-          </a:p>
-          <a:p>
-            <a:pPr>
-              <a:spcAft>
-                <a:spcPts val="600"/>
-              </a:spcAft>
-            </a:pPr>
-            <a:r>
-              <a:rPr sz="1500">
-                <a:solidFill>
-                  <a:srgbClr val="22282E"/>
-                </a:solidFill>
-              </a:rPr>
-              <a:t>•  Muestras IQ: representación compleja (in-phase/quadrature) de la señal. Característica: contienen amplitud y fase para demodular cualquier esquema.</a:t>
-            </a:r>
-          </a:p>
-          <a:p>
-            <a:pPr>
-              <a:spcAft>
-                <a:spcPts val="600"/>
-              </a:spcAft>
-            </a:pPr>
-            <a:r>
-              <a:rPr sz="1500">
-                <a:solidFill>
-                  <a:srgbClr val="22282E"/>
-                </a:solidFill>
-              </a:rPr>
-              <a:t>•  OOK/ASK: modulación por presencia/ausencia o amplitud de portadora, típica de mandos baratos. Característica: fácil de demodular visualmente.</a:t>
-            </a:r>
-          </a:p>
-          <a:p>
-            <a:pPr>
-              <a:spcAft>
-                <a:spcPts val="600"/>
-              </a:spcAft>
-            </a:pPr>
-            <a:r>
-              <a:rPr sz="1500">
-                <a:solidFill>
-                  <a:srgbClr val="22282E"/>
-                </a:solidFill>
-              </a:rPr>
-              <a:t>•  FSK: modulación por desplazamiento de frecuencia. Característica: común en sensores y telemetría.</a:t>
-            </a:r>
-          </a:p>
-          <a:p>
-            <a:pPr>
-              <a:spcAft>
-                <a:spcPts val="600"/>
-              </a:spcAft>
-            </a:pPr>
-            <a:r>
-              <a:rPr sz="1500">
-                <a:solidFill>
-                  <a:srgbClr val="22282E"/>
-                </a:solidFill>
-              </a:rPr>
-              <a:t>•  GNU Radio: framework de flujogramas para procesar señales. Característica: construye demoduladores por bloques.</a:t>
-            </a:r>
-          </a:p>
-          <a:p>
-            <a:pPr>
-              <a:spcAft>
-                <a:spcPts val="600"/>
-              </a:spcAft>
-            </a:pPr>
-            <a:r>
-              <a:rPr sz="1500">
-                <a:solidFill>
-                  <a:srgbClr val="22282E"/>
-                </a:solidFill>
-              </a:rPr>
-              <a:t>•  Universal Radio Hacker (URH): herramienta que descubre, demodula y decodifica protocolos inalámbricos. Característica: acelera el análisis de tramas.</a:t>
+              <a:t>•  SDR traslada filtrado, demodulación y decodificación al software. El receptor mezcla una banda alrededor de la frecuencia central y muestrea componentes I/Q. La tasa de muestreo limita el ancho…</a:t>
+            </a:r>
+          </a:p>
+          <a:p>
+            <a:pPr>
+              <a:spcAft>
+                <a:spcPts val="600"/>
+              </a:spcAft>
+            </a:pPr>
+            <a:r>
+              <a:rPr sz="1500">
+                <a:solidFill>
+                  <a:srgbClr val="22282E"/>
+                </a:solidFill>
+              </a:rPr>
+              <a:t>•  El análisis parte de una transmisión propia de baja potencia o un archivo de captura publicado. Se registra hardware, frecuencia central, tasa, ganancia, reloj y entorno. Primero se distingue ruido…</a:t>
+            </a:r>
+          </a:p>
+          <a:p>
+            <a:pPr>
+              <a:spcAft>
+                <a:spcPts val="600"/>
+              </a:spcAft>
+            </a:pPr>
+            <a:r>
+              <a:rPr sz="1500">
+                <a:solidFill>
+                  <a:srgbClr val="22282E"/>
+                </a:solidFill>
+              </a:rPr>
+              <a:t>•  Recibir o transmitir está regulado de forma distinta según país, banda y contenido. Algunos servicios no pueden interceptarse ni decodificarse aunque la señal sea físicamente accesible. Transmitir…</a:t>
+            </a:r>
+          </a:p>
+          <a:p>
+            <a:pPr>
+              <a:spcAft>
+                <a:spcPts val="600"/>
+              </a:spcAft>
+            </a:pPr>
+            <a:r>
+              <a:rPr sz="1500">
+                <a:solidFill>
+                  <a:srgbClr val="22282E"/>
+                </a:solidFill>
+              </a:rPr>
+              <a:t>•  Un pico aparece simétrico respecto del centro y cambia al variar ganancia. No se atribuye a dos transmisores: se evalúa imagen o saturación del front-end, se reduce ganancia, cambia frecuencia…</a:t>
             </a:r>
           </a:p>
         </p:txBody>
@@ -4256,7 +4737,7 @@
                   <a:srgbClr val="0B3D2E"/>
                 </a:solidFill>
               </a:rPr>
-              <a:t>🧰 Herramientas y preparación</a:t>
+              <a:t>📔 Glosario operativo</a:t>
             </a:r>
           </a:p>
         </p:txBody>
@@ -4294,67 +4775,82 @@
                   <a:srgbClr val="22282E"/>
                 </a:solidFill>
               </a:rPr>
-              <a:t>•  RTL-SDR (recepción, ~24–1766 MHz) o HackRF One (TX/RX 1 MHz–6 GHz, solo TX en laboratorio propio y bandas permitidas).</a:t>
-            </a:r>
-          </a:p>
-          <a:p>
-            <a:pPr>
-              <a:spcAft>
-                <a:spcPts val="600"/>
-              </a:spcAft>
-            </a:pPr>
-            <a:r>
-              <a:rPr sz="1500">
-                <a:solidFill>
-                  <a:srgbClr val="22282E"/>
-                </a:solidFill>
-              </a:rPr>
-              <a:t>•  GQRX/SDR# para exploración, GNU Radio Companion y URH para análisis.</a:t>
-            </a:r>
-          </a:p>
-          <a:p>
-            <a:pPr>
-              <a:spcAft>
-                <a:spcPts val="600"/>
-              </a:spcAft>
-            </a:pPr>
-            <a:r>
-              <a:rPr sz="1500">
-                <a:solidFill>
-                  <a:srgbClr val="22282E"/>
-                </a:solidFill>
-              </a:rPr>
-              <a:t>•  rtltest -t                         # prueba del RTL-SDR</a:t>
-            </a:r>
-          </a:p>
-          <a:p>
-            <a:pPr>
-              <a:spcAft>
-                <a:spcPts val="600"/>
-              </a:spcAft>
-            </a:pPr>
-            <a:r>
-              <a:rPr sz="1500">
-                <a:solidFill>
-                  <a:srgbClr val="22282E"/>
-                </a:solidFill>
-              </a:rPr>
-              <a:t>•  gqrx                                # exploración con waterfall</a:t>
-            </a:r>
-          </a:p>
-          <a:p>
-            <a:pPr>
-              <a:spcAft>
-                <a:spcPts val="600"/>
-              </a:spcAft>
-            </a:pPr>
-            <a:r>
-              <a:rPr sz="1500">
-                <a:solidFill>
-                  <a:srgbClr val="22282E"/>
-                </a:solidFill>
-              </a:rPr>
-              <a:t>•  rtlsdr -f 433920000 -s 2048000 -g 40 captura.iq</a:t>
+              <a:t>•  Término — Definición útil</a:t>
+            </a:r>
+          </a:p>
+          <a:p>
+            <a:pPr>
+              <a:spcAft>
+                <a:spcPts val="600"/>
+              </a:spcAft>
+            </a:pPr>
+            <a:r>
+              <a:rPr sz="1500">
+                <a:solidFill>
+                  <a:srgbClr val="22282E"/>
+                </a:solidFill>
+              </a:rPr>
+              <a:t>•  I/Q — Dos componentes ortogonales que conservan amplitud y fase.</a:t>
+            </a:r>
+          </a:p>
+          <a:p>
+            <a:pPr>
+              <a:spcAft>
+                <a:spcPts val="600"/>
+              </a:spcAft>
+            </a:pPr>
+            <a:r>
+              <a:rPr sz="1500">
+                <a:solidFill>
+                  <a:srgbClr val="22282E"/>
+                </a:solidFill>
+              </a:rPr>
+              <a:t>•  Tasa de muestreo — Número de muestras por segundo y límite práctico de banda observada.</a:t>
+            </a:r>
+          </a:p>
+          <a:p>
+            <a:pPr>
+              <a:spcAft>
+                <a:spcPts val="600"/>
+              </a:spcAft>
+            </a:pPr>
+            <a:r>
+              <a:rPr sz="1500">
+                <a:solidFill>
+                  <a:srgbClr val="22282E"/>
+                </a:solidFill>
+              </a:rPr>
+              <a:t>•  Saturación — Sobrecarga que distorsiona y crea señales espurias.</a:t>
+            </a:r>
+          </a:p>
+          <a:p>
+            <a:pPr>
+              <a:spcAft>
+                <a:spcPts val="600"/>
+              </a:spcAft>
+            </a:pPr>
+            <a:r>
+              <a:rPr sz="1500">
+                <a:solidFill>
+                  <a:srgbClr val="22282E"/>
+                </a:solidFill>
+              </a:rPr>
+              <a:t>•  Demodulación — Recuperación de símbolos o información desde una portadora modulada.</a:t>
+            </a:r>
+          </a:p>
+          <a:p>
+            <a:pPr>
+              <a:spcAft>
+                <a:spcPts val="600"/>
+              </a:spcAft>
+            </a:pPr>
+            <a:r>
+              <a:rPr sz="1500">
+                <a:solidFill>
+                  <a:srgbClr val="22282E"/>
+                </a:solidFill>
+              </a:rPr>
+              <a:t>•  PPM — Error relativo de frecuencia del oscilador.</a:t>
             </a:r>
           </a:p>
         </p:txBody>
@@ -4405,7 +4901,7 @@
                   <a:srgbClr val="0B3D2E"/>
                 </a:solidFill>
               </a:rPr>
-              <a:t>🧪 Laboratorio guiado</a:t>
+              <a:t>✅ Criterio de dominio</a:t>
             </a:r>
           </a:p>
         </p:txBody>
@@ -4443,97 +4939,7 @@
                   <a:srgbClr val="22282E"/>
                 </a:solidFill>
               </a:rPr>
-              <a:t>•  Conecta el SDR y verifica con rtltest que funciona sin pérdidas de muestras.</a:t>
-            </a:r>
-          </a:p>
-          <a:p>
-            <a:pPr>
-              <a:spcAft>
-                <a:spcPts val="600"/>
-              </a:spcAft>
-            </a:pPr>
-            <a:r>
-              <a:rPr sz="1500">
-                <a:solidFill>
-                  <a:srgbClr val="22282E"/>
-                </a:solidFill>
-              </a:rPr>
-              <a:t>•  Explora el espectro: en GQRX, sintoniza la banda ISM de 433 MHz y observa el waterfall mientras accionas un mando propio.</a:t>
-            </a:r>
-          </a:p>
-          <a:p>
-            <a:pPr>
-              <a:spcAft>
-                <a:spcPts val="600"/>
-              </a:spcAft>
-            </a:pPr>
-            <a:r>
-              <a:rPr sz="1500">
-                <a:solidFill>
-                  <a:srgbClr val="22282E"/>
-                </a:solidFill>
-              </a:rPr>
-              <a:t>•  Localiza la señal: identifica la frecuencia central exacta de la ráfaga del mando.</a:t>
-            </a:r>
-          </a:p>
-          <a:p>
-            <a:pPr>
-              <a:spcAft>
-                <a:spcPts val="600"/>
-              </a:spcAft>
-            </a:pPr>
-            <a:r>
-              <a:rPr sz="1500">
-                <a:solidFill>
-                  <a:srgbClr val="22282E"/>
-                </a:solidFill>
-              </a:rPr>
-              <a:t>•  Captura IQ: graba la transmisión con rtlsdr o desde URH a la frecuencia adecuada.</a:t>
-            </a:r>
-          </a:p>
-          <a:p>
-            <a:pPr>
-              <a:spcAft>
-                <a:spcPts val="600"/>
-              </a:spcAft>
-            </a:pPr>
-            <a:r>
-              <a:rPr sz="1500">
-                <a:solidFill>
-                  <a:srgbClr val="22282E"/>
-                </a:solidFill>
-              </a:rPr>
-              <a:t>•  Determina la modulación: en URH, visualiza la señal y decide si es OOK/ASK o FSK.</a:t>
-            </a:r>
-          </a:p>
-          <a:p>
-            <a:pPr>
-              <a:spcAft>
-                <a:spcPts val="600"/>
-              </a:spcAft>
-            </a:pPr>
-            <a:r>
-              <a:rPr sz="1500">
-                <a:solidFill>
-                  <a:srgbClr val="22282E"/>
-                </a:solidFill>
-              </a:rPr>
-              <a:t>•  Demodula y decodifica: ajusta parámetros (samples/símbolo, umbral) hasta obtener los bits; identifica preámbulo y payload.</a:t>
-            </a:r>
-          </a:p>
-          <a:p>
-            <a:pPr>
-              <a:spcAft>
-                <a:spcPts val="600"/>
-              </a:spcAft>
-            </a:pPr>
-            <a:r>
-              <a:rPr sz="1500">
-                <a:solidFill>
-                  <a:srgbClr val="22282E"/>
-                </a:solidFill>
-              </a:rPr>
-              <a:t>•  Interpreta el protocolo: compara varias pulsaciones para ver qué campos cambian (contador rolling code vs. código fijo).</a:t>
+              <a:t>•  El alumno domina SDR cuando configura una captura reproducible, distingue artefactos del receptor, explica el camino IQ a trama y mantiene recepción y emisión dentro de permisos y aislamiento.</a:t>
             </a:r>
           </a:p>
         </p:txBody>
@@ -4584,7 +4990,7 @@
                   <a:srgbClr val="0B3D2E"/>
                 </a:solidFill>
               </a:rPr>
-              <a:t>✍️ Ejercicios</a:t>
+              <a:t>📖 Definiciones y características</a:t>
             </a:r>
           </a:p>
         </p:txBody>
@@ -4622,82 +5028,82 @@
                   <a:srgbClr val="22282E"/>
                 </a:solidFill>
               </a:rPr>
-              <a:t>•  Identifica la frecuencia central de un mando propio con GQRX.</a:t>
-            </a:r>
-          </a:p>
-          <a:p>
-            <a:pPr>
-              <a:spcAft>
-                <a:spcPts val="600"/>
-              </a:spcAft>
-            </a:pPr>
-            <a:r>
-              <a:rPr sz="1500">
-                <a:solidFill>
-                  <a:srgbClr val="22282E"/>
-                </a:solidFill>
-              </a:rPr>
-              <a:t>•  Captura tres pulsaciones del mismo botón a fichero IQ.</a:t>
-            </a:r>
-          </a:p>
-          <a:p>
-            <a:pPr>
-              <a:spcAft>
-                <a:spcPts val="600"/>
-              </a:spcAft>
-            </a:pPr>
-            <a:r>
-              <a:rPr sz="1500">
-                <a:solidFill>
-                  <a:srgbClr val="22282E"/>
-                </a:solidFill>
-              </a:rPr>
-              <a:t>•  Clasifica la modulación observando la forma de onda en URH.</a:t>
-            </a:r>
-          </a:p>
-          <a:p>
-            <a:pPr>
-              <a:spcAft>
-                <a:spcPts val="600"/>
-              </a:spcAft>
-            </a:pPr>
-            <a:r>
-              <a:rPr sz="1500">
-                <a:solidFill>
-                  <a:srgbClr val="22282E"/>
-                </a:solidFill>
-              </a:rPr>
-              <a:t>•  Decodifica los bits de la trama y localiza el preámbulo.</a:t>
-            </a:r>
-          </a:p>
-          <a:p>
-            <a:pPr>
-              <a:spcAft>
-                <a:spcPts val="600"/>
-              </a:spcAft>
-            </a:pPr>
-            <a:r>
-              <a:rPr sz="1500">
-                <a:solidFill>
-                  <a:srgbClr val="22282E"/>
-                </a:solidFill>
-              </a:rPr>
-              <a:t>•  Compara pulsaciones para determinar si usa código fijo o rolling code.</a:t>
-            </a:r>
-          </a:p>
-          <a:p>
-            <a:pPr>
-              <a:spcAft>
-                <a:spcPts val="600"/>
-              </a:spcAft>
-            </a:pPr>
-            <a:r>
-              <a:rPr sz="1500">
-                <a:solidFill>
-                  <a:srgbClr val="22282E"/>
-                </a:solidFill>
-              </a:rPr>
-              <a:t>•  Documenta los parámetros necesarios para reproducir la captura.</a:t>
+              <a:t>•  SDR: radio cuyo procesamiento se hace en software sobre muestras digitalizadas. Característica: flexible para muchas bandas y protocolos.</a:t>
+            </a:r>
+          </a:p>
+          <a:p>
+            <a:pPr>
+              <a:spcAft>
+                <a:spcPts val="600"/>
+              </a:spcAft>
+            </a:pPr>
+            <a:r>
+              <a:rPr sz="1500">
+                <a:solidFill>
+                  <a:srgbClr val="22282E"/>
+                </a:solidFill>
+              </a:rPr>
+              <a:t>•  Muestras IQ: representación compleja de una banda mediante componentes en fase y cuadratura. Característica: conserva información útil de amplitud y fase dentro de ancho, tasa y calidad capturados…</a:t>
+            </a:r>
+          </a:p>
+          <a:p>
+            <a:pPr>
+              <a:spcAft>
+                <a:spcPts val="600"/>
+              </a:spcAft>
+            </a:pPr>
+            <a:r>
+              <a:rPr sz="1500">
+                <a:solidFill>
+                  <a:srgbClr val="22282E"/>
+                </a:solidFill>
+              </a:rPr>
+              <a:t>•  OOK/ASK: modulación por presencia/ausencia o amplitud de portadora, típica de mandos baratos. Característica: fácil de demodular visualmente.</a:t>
+            </a:r>
+          </a:p>
+          <a:p>
+            <a:pPr>
+              <a:spcAft>
+                <a:spcPts val="600"/>
+              </a:spcAft>
+            </a:pPr>
+            <a:r>
+              <a:rPr sz="1500">
+                <a:solidFill>
+                  <a:srgbClr val="22282E"/>
+                </a:solidFill>
+              </a:rPr>
+              <a:t>•  FSK: modulación por desplazamiento de frecuencia. Característica: común en sensores y telemetría.</a:t>
+            </a:r>
+          </a:p>
+          <a:p>
+            <a:pPr>
+              <a:spcAft>
+                <a:spcPts val="600"/>
+              </a:spcAft>
+            </a:pPr>
+            <a:r>
+              <a:rPr sz="1500">
+                <a:solidFill>
+                  <a:srgbClr val="22282E"/>
+                </a:solidFill>
+              </a:rPr>
+              <a:t>•  GNU Radio: framework de flujogramas para procesar señales. Característica: construye demoduladores por bloques.</a:t>
+            </a:r>
+          </a:p>
+          <a:p>
+            <a:pPr>
+              <a:spcAft>
+                <a:spcPts val="600"/>
+              </a:spcAft>
+            </a:pPr>
+            <a:r>
+              <a:rPr sz="1500">
+                <a:solidFill>
+                  <a:srgbClr val="22282E"/>
+                </a:solidFill>
+              </a:rPr>
+              <a:t>•  Universal Radio Hacker (URH): herramienta que descubre, demodula y decodifica protocolos inalámbricos. Característica: acelera el análisis de tramas.</a:t>
             </a:r>
           </a:p>
         </p:txBody>
@@ -4748,7 +5154,7 @@
                   <a:srgbClr val="0B3D2E"/>
                 </a:solidFill>
               </a:rPr>
-              <a:t>📝 Reto verificable</a:t>
+              <a:t>🧰 Herramientas y preparación</a:t>
             </a:r>
           </a:p>
         </p:txBody>
@@ -4786,7 +5192,22 @@
                   <a:srgbClr val="22282E"/>
                 </a:solidFill>
               </a:rPr>
-              <a:t>•  Captura y decodifica la señal de un dispositivo sub-GHz propio (mando de garaje viejo, estación meteorológica, sensor). Criterio de aceptación: entregas la frecuencia, la modulación y la tasa de símbolo correctas, y una decodificación de los bits del payload con identificación de al menos el preámbulo y un campo de datos. No se requiere ni se permite retransmitir señales.</a:t>
+              <a:t>•  RTL-SDR (recepción, ~24–1766 MHz) o HackRF One (TX/RX 1 MHz–6 GHz, solo TX en laboratorio propio y bandas permitidas).</a:t>
+            </a:r>
+          </a:p>
+          <a:p>
+            <a:pPr>
+              <a:spcAft>
+                <a:spcPts val="600"/>
+              </a:spcAft>
+            </a:pPr>
+            <a:r>
+              <a:rPr sz="1500">
+                <a:solidFill>
+                  <a:srgbClr val="22282E"/>
+                </a:solidFill>
+              </a:rPr>
+              <a:t>•  GQRX/SDR# para exploración, GNU Radio Companion y URH para análisis.</a:t>
             </a:r>
           </a:p>
         </p:txBody>
